--- a/presentation.pptx
+++ b/presentation.pptx
@@ -5200,7 +5200,7 @@
     <p:bg>
       <p:bgPr>
         <a:solidFill>
-          <a:srgbClr val="F0F2F5"/>
+          <a:srgbClr val="FFFFFF"/>
         </a:solidFill>
         <a:effectLst/>
       </p:bgPr>
@@ -5543,7 +5543,7 @@
     <p:bg>
       <p:bgPr>
         <a:solidFill>
-          <a:srgbClr val="F0F2F5"/>
+          <a:srgbClr val="FFFFFF"/>
         </a:solidFill>
         <a:effectLst/>
       </p:bgPr>
